--- a/public/fun/pack/pptx/talkpro/발표템플릿프리미엄_08_업무보고_아이스블루.pptx
+++ b/public/fun/pack/pptx/talkpro/발표템플릿프리미엄_08_업무보고_아이스블루.pptx
@@ -115,12 +115,12 @@
   <p:extLst>
     <p:ext uri="{521415D9-36F7-43E2-AB2F-B90AF26B5E84}">
       <p14:sectionLst xmlns:p14="http://schemas.microsoft.com/office/powerpoint/2010/main">
-        <p14:section name="시작" id="{E29839C5-FBC6-44EB-9B53-6786E904F57A}">
+        <p14:section name="시작" id="{3F3A5FBA-8DA1-47A4-BC15-20331278D361}">
           <p14:sldIdLst>
             <p14:sldId id="256"/>
           </p14:sldIdLst>
         </p14:section>
-        <p14:section name="본문" id="{070D680E-FF87-406D-9DF9-435281281970}">
+        <p14:section name="본문" id="{6A326B62-4A1B-41BA-810E-45D255A8B0A8}">
           <p14:sldIdLst>
             <p14:sldId id="257"/>
             <p14:sldId id="258"/>
@@ -131,7 +131,7 @@
             <p14:sldId id="263"/>
           </p14:sldIdLst>
         </p14:section>
-        <p14:section name="마무리" id="{361A3BE3-EF37-4085-A4FF-A2FE3442A700}">
+        <p14:section name="마무리" id="{A2428E70-57AE-4B5A-82F6-74AF56AB4470}">
           <p14:sldIdLst>
             <p14:sldId id="264"/>
           </p14:sldIdLst>
@@ -1935,7 +1935,7 @@
             </a:lvl1pPr>
           </a:lstStyle>
           <a:p>
-            <a:fld id="{2914DF61-897E-46E6-93E0-8F9BFE795B4A}" type="slidenum">
+            <a:fld id="{70CDABF1-3C4B-4849-A6F8-4A2052BD4E78}" type="slidenum">
               <a:rPr lang="en-US"/>
               <a:t>‹#›</a:t>
             </a:fld>
@@ -2567,7 +2567,7 @@
             </a:lvl1pPr>
           </a:lstStyle>
           <a:p>
-            <a:fld id="{B55BEF71-48AE-45E0-8CA3-F68317E72478}" type="slidenum">
+            <a:fld id="{8B9B439D-08E2-41DB-918D-67B9E8AE90AC}" type="slidenum">
               <a:rPr lang="en-US"/>
               <a:t>‹#›</a:t>
             </a:fld>
@@ -3164,7 +3164,7 @@
             </a:lvl1pPr>
           </a:lstStyle>
           <a:p>
-            <a:fld id="{E0F807D6-4991-471D-A021-27E90B42FD6F}" type="slidenum">
+            <a:fld id="{6C69BDCB-161C-4DC6-BF2F-32C7DD0F2E19}" type="slidenum">
               <a:rPr lang="en-US"/>
               <a:t>‹#›</a:t>
             </a:fld>
@@ -3973,7 +3973,7 @@
           <a:p>
             <a:r>
               <a:rPr lang="ko-KR"/>
-              <a:t>0000. 00. 00</a:t>
+              <a:t>날짜 입력</a:t>
             </a:r>
           </a:p>
         </p:txBody>
@@ -4058,7 +4058,7 @@
           <a:bodyPr/>
           <a:lstStyle/>
           <a:p>
-            <a:fld id="{FBB861A8-21FA-4DCE-9CB9-75C8339841A0}" type="slidenum">
+            <a:fld id="{DD0EA9DD-BD59-497C-A741-ED0D79A8DC03}" type="slidenum">
               <a:rPr lang="en-US"/>
               <a:t>‹#›</a:t>
             </a:fld>
@@ -5260,7 +5260,7 @@
           <a:bodyPr/>
           <a:lstStyle/>
           <a:p>
-            <a:fld id="{251E35AC-689D-44B5-8DC6-B31E552EF099}" type="slidenum">
+            <a:fld id="{0F97259C-D9E9-49F0-98AF-A80014F839B9}" type="slidenum">
               <a:rPr lang="en-US"/>
               <a:t>‹#›</a:t>
             </a:fld>
@@ -5348,7 +5348,7 @@
           <a:bodyPr/>
           <a:lstStyle/>
           <a:p>
-            <a:fld id="{194CE0C5-9D69-4041-AC89-51C676B38B36}" type="slidenum">
+            <a:fld id="{784F5266-14AA-4649-9AC6-FE536D7DDAB9}" type="slidenum">
               <a:rPr lang="en-US"/>
               <a:t>‹#›</a:t>
             </a:fld>
@@ -6321,7 +6321,7 @@
           <a:bodyPr/>
           <a:lstStyle/>
           <a:p>
-            <a:fld id="{6B9C7CCA-1BC7-4FDA-8312-80220C756E12}" type="slidenum">
+            <a:fld id="{7CFC1113-6BB7-4E1B-BB76-DB2660FF9595}" type="slidenum">
               <a:rPr lang="en-US"/>
               <a:t>‹#›</a:t>
             </a:fld>
@@ -6969,7 +6969,7 @@
           <a:bodyPr/>
           <a:lstStyle/>
           <a:p>
-            <a:fld id="{75F8B870-0387-4743-8A39-9F928AAD6E38}" type="slidenum">
+            <a:fld id="{0A40DDB3-BE11-4DA6-8A0D-B3F795CD57E2}" type="slidenum">
               <a:rPr lang="en-US"/>
               <a:t>‹#›</a:t>
             </a:fld>
@@ -7152,7 +7152,7 @@
           <a:bodyPr/>
           <a:lstStyle/>
           <a:p>
-            <a:fld id="{8A43D47A-EC14-4674-A110-85074237B525}" type="slidenum">
+            <a:fld id="{57D86B6D-3E50-489F-B3CF-47EE382BB275}" type="slidenum">
               <a:rPr lang="en-US"/>
               <a:t>‹#›</a:t>
             </a:fld>
@@ -8216,7 +8216,7 @@
           <a:bodyPr/>
           <a:lstStyle/>
           <a:p>
-            <a:fld id="{7ABF7669-3934-4493-A2E4-2DA0B242B0C8}" type="slidenum">
+            <a:fld id="{DFDDB988-4350-4F6F-AA13-3AC695C96493}" type="slidenum">
               <a:rPr lang="en-US"/>
               <a:t>‹#›</a:t>
             </a:fld>
